--- a/~sasano/lecture/proglang/26/proglang11hosoku.pptx
+++ b/~sasano/lecture/proglang/26/proglang11hosoku.pptx
@@ -107,6 +107,22 @@
       </a:defRPr>
     </a:lvl9pPr>
   </p:defaultTextStyle>
+  <p:extLst>
+    <p:ext uri="{EFAFB233-063F-42B5-8137-9DF3F51BA10A}">
+      <p15:sldGuideLst xmlns:p15="http://schemas.microsoft.com/office/powerpoint/2012/main">
+        <p15:guide id="1" orient="horz" pos="2160">
+          <p15:clr>
+            <a:srgbClr val="A4A3A4"/>
+          </p15:clr>
+        </p15:guide>
+        <p15:guide id="2" pos="2880">
+          <p15:clr>
+            <a:srgbClr val="A4A3A4"/>
+          </p15:clr>
+        </p15:guide>
+      </p15:sldGuideLst>
+    </p:ext>
+  </p:extLst>
 </p:presentation>
 </file>
 
@@ -148,10 +164,9 @@
           <a:lstStyle/>
           <a:p>
             <a:r>
-              <a:rPr kumimoji="1" lang="ja-JP" altLang="en-US" smtClean="0"/>
+              <a:rPr kumimoji="1" lang="ja-JP" altLang="en-US"/>
               <a:t>マスター タイトルの書式設定</a:t>
             </a:r>
-            <a:endParaRPr kumimoji="1" lang="ja-JP" altLang="en-US"/>
           </a:p>
         </p:txBody>
       </p:sp>
@@ -267,10 +282,9 @@
           </a:lstStyle>
           <a:p>
             <a:r>
-              <a:rPr kumimoji="1" lang="ja-JP" altLang="en-US" smtClean="0"/>
+              <a:rPr kumimoji="1" lang="ja-JP" altLang="en-US"/>
               <a:t>マスター サブタイトルの書式設定</a:t>
             </a:r>
-            <a:endParaRPr kumimoji="1" lang="ja-JP" altLang="en-US"/>
           </a:p>
         </p:txBody>
       </p:sp>
@@ -291,7 +305,7 @@
           <a:p>
             <a:fld id="{01AC0B91-4105-FC41-AF23-562AED5B73ED}" type="datetimeFigureOut">
               <a:rPr kumimoji="1" lang="ja-JP" altLang="en-US" smtClean="0"/>
-              <a:t>17/09/18</a:t>
+              <a:t>2026/9/28</a:t>
             </a:fld>
             <a:endParaRPr kumimoji="1" lang="ja-JP" altLang="en-US"/>
           </a:p>
@@ -385,10 +399,9 @@
           <a:lstStyle/>
           <a:p>
             <a:r>
-              <a:rPr kumimoji="1" lang="ja-JP" altLang="en-US" smtClean="0"/>
+              <a:rPr kumimoji="1" lang="ja-JP" altLang="en-US"/>
               <a:t>マスター タイトルの書式設定</a:t>
             </a:r>
-            <a:endParaRPr kumimoji="1" lang="ja-JP" altLang="en-US"/>
           </a:p>
         </p:txBody>
       </p:sp>
@@ -409,70 +422,69 @@
           <a:p>
             <a:pPr lvl="0"/>
             <a:r>
-              <a:rPr kumimoji="1" lang="ja-JP" altLang="en-US" smtClean="0"/>
+              <a:rPr kumimoji="1" lang="ja-JP" altLang="en-US"/>
               <a:t>マスター テキストの書式設定</a:t>
             </a:r>
           </a:p>
           <a:p>
             <a:pPr lvl="1"/>
             <a:r>
-              <a:rPr kumimoji="1" lang="ja-JP" altLang="en-US" smtClean="0"/>
+              <a:rPr kumimoji="1" lang="ja-JP" altLang="en-US"/>
               <a:t>第 </a:t>
             </a:r>
             <a:r>
-              <a:rPr kumimoji="1" lang="en-US" altLang="ja-JP" smtClean="0"/>
+              <a:rPr kumimoji="1" lang="en-US" altLang="ja-JP"/>
               <a:t>2 </a:t>
             </a:r>
             <a:r>
-              <a:rPr kumimoji="1" lang="ja-JP" altLang="en-US" smtClean="0"/>
+              <a:rPr kumimoji="1" lang="ja-JP" altLang="en-US"/>
               <a:t>レベル</a:t>
             </a:r>
           </a:p>
           <a:p>
             <a:pPr lvl="2"/>
             <a:r>
-              <a:rPr kumimoji="1" lang="ja-JP" altLang="en-US" smtClean="0"/>
+              <a:rPr kumimoji="1" lang="ja-JP" altLang="en-US"/>
               <a:t>第 </a:t>
             </a:r>
             <a:r>
-              <a:rPr kumimoji="1" lang="en-US" altLang="ja-JP" smtClean="0"/>
+              <a:rPr kumimoji="1" lang="en-US" altLang="ja-JP"/>
               <a:t>3 </a:t>
             </a:r>
             <a:r>
-              <a:rPr kumimoji="1" lang="ja-JP" altLang="en-US" smtClean="0"/>
+              <a:rPr kumimoji="1" lang="ja-JP" altLang="en-US"/>
               <a:t>レベル</a:t>
             </a:r>
           </a:p>
           <a:p>
             <a:pPr lvl="3"/>
             <a:r>
-              <a:rPr kumimoji="1" lang="ja-JP" altLang="en-US" smtClean="0"/>
+              <a:rPr kumimoji="1" lang="ja-JP" altLang="en-US"/>
               <a:t>第 </a:t>
             </a:r>
             <a:r>
-              <a:rPr kumimoji="1" lang="en-US" altLang="ja-JP" smtClean="0"/>
+              <a:rPr kumimoji="1" lang="en-US" altLang="ja-JP"/>
               <a:t>4 </a:t>
             </a:r>
             <a:r>
-              <a:rPr kumimoji="1" lang="ja-JP" altLang="en-US" smtClean="0"/>
+              <a:rPr kumimoji="1" lang="ja-JP" altLang="en-US"/>
               <a:t>レベル</a:t>
             </a:r>
           </a:p>
           <a:p>
             <a:pPr lvl="4"/>
             <a:r>
-              <a:rPr kumimoji="1" lang="ja-JP" altLang="en-US" smtClean="0"/>
+              <a:rPr kumimoji="1" lang="ja-JP" altLang="en-US"/>
               <a:t>第 </a:t>
             </a:r>
             <a:r>
-              <a:rPr kumimoji="1" lang="en-US" altLang="ja-JP" smtClean="0"/>
+              <a:rPr kumimoji="1" lang="en-US" altLang="ja-JP"/>
               <a:t>5 </a:t>
             </a:r>
             <a:r>
-              <a:rPr kumimoji="1" lang="ja-JP" altLang="en-US" smtClean="0"/>
+              <a:rPr kumimoji="1" lang="ja-JP" altLang="en-US"/>
               <a:t>レベル</a:t>
             </a:r>
-            <a:endParaRPr kumimoji="1" lang="ja-JP" altLang="en-US"/>
           </a:p>
         </p:txBody>
       </p:sp>
@@ -493,7 +505,7 @@
           <a:p>
             <a:fld id="{01AC0B91-4105-FC41-AF23-562AED5B73ED}" type="datetimeFigureOut">
               <a:rPr kumimoji="1" lang="ja-JP" altLang="en-US" smtClean="0"/>
-              <a:t>17/09/18</a:t>
+              <a:t>2026/9/28</a:t>
             </a:fld>
             <a:endParaRPr kumimoji="1" lang="ja-JP" altLang="en-US"/>
           </a:p>
@@ -592,10 +604,9 @@
           <a:lstStyle/>
           <a:p>
             <a:r>
-              <a:rPr kumimoji="1" lang="ja-JP" altLang="en-US" smtClean="0"/>
+              <a:rPr kumimoji="1" lang="ja-JP" altLang="en-US"/>
               <a:t>マスター タイトルの書式設定</a:t>
             </a:r>
-            <a:endParaRPr kumimoji="1" lang="ja-JP" altLang="en-US"/>
           </a:p>
         </p:txBody>
       </p:sp>
@@ -621,70 +632,69 @@
           <a:p>
             <a:pPr lvl="0"/>
             <a:r>
-              <a:rPr kumimoji="1" lang="ja-JP" altLang="en-US" smtClean="0"/>
+              <a:rPr kumimoji="1" lang="ja-JP" altLang="en-US"/>
               <a:t>マスター テキストの書式設定</a:t>
             </a:r>
           </a:p>
           <a:p>
             <a:pPr lvl="1"/>
             <a:r>
-              <a:rPr kumimoji="1" lang="ja-JP" altLang="en-US" smtClean="0"/>
+              <a:rPr kumimoji="1" lang="ja-JP" altLang="en-US"/>
               <a:t>第 </a:t>
             </a:r>
             <a:r>
-              <a:rPr kumimoji="1" lang="en-US" altLang="ja-JP" smtClean="0"/>
+              <a:rPr kumimoji="1" lang="en-US" altLang="ja-JP"/>
               <a:t>2 </a:t>
             </a:r>
             <a:r>
-              <a:rPr kumimoji="1" lang="ja-JP" altLang="en-US" smtClean="0"/>
+              <a:rPr kumimoji="1" lang="ja-JP" altLang="en-US"/>
               <a:t>レベル</a:t>
             </a:r>
           </a:p>
           <a:p>
             <a:pPr lvl="2"/>
             <a:r>
-              <a:rPr kumimoji="1" lang="ja-JP" altLang="en-US" smtClean="0"/>
+              <a:rPr kumimoji="1" lang="ja-JP" altLang="en-US"/>
               <a:t>第 </a:t>
             </a:r>
             <a:r>
-              <a:rPr kumimoji="1" lang="en-US" altLang="ja-JP" smtClean="0"/>
+              <a:rPr kumimoji="1" lang="en-US" altLang="ja-JP"/>
               <a:t>3 </a:t>
             </a:r>
             <a:r>
-              <a:rPr kumimoji="1" lang="ja-JP" altLang="en-US" smtClean="0"/>
+              <a:rPr kumimoji="1" lang="ja-JP" altLang="en-US"/>
               <a:t>レベル</a:t>
             </a:r>
           </a:p>
           <a:p>
             <a:pPr lvl="3"/>
             <a:r>
-              <a:rPr kumimoji="1" lang="ja-JP" altLang="en-US" smtClean="0"/>
+              <a:rPr kumimoji="1" lang="ja-JP" altLang="en-US"/>
               <a:t>第 </a:t>
             </a:r>
             <a:r>
-              <a:rPr kumimoji="1" lang="en-US" altLang="ja-JP" smtClean="0"/>
+              <a:rPr kumimoji="1" lang="en-US" altLang="ja-JP"/>
               <a:t>4 </a:t>
             </a:r>
             <a:r>
-              <a:rPr kumimoji="1" lang="ja-JP" altLang="en-US" smtClean="0"/>
+              <a:rPr kumimoji="1" lang="ja-JP" altLang="en-US"/>
               <a:t>レベル</a:t>
             </a:r>
           </a:p>
           <a:p>
             <a:pPr lvl="4"/>
             <a:r>
-              <a:rPr kumimoji="1" lang="ja-JP" altLang="en-US" smtClean="0"/>
+              <a:rPr kumimoji="1" lang="ja-JP" altLang="en-US"/>
               <a:t>第 </a:t>
             </a:r>
             <a:r>
-              <a:rPr kumimoji="1" lang="en-US" altLang="ja-JP" smtClean="0"/>
+              <a:rPr kumimoji="1" lang="en-US" altLang="ja-JP"/>
               <a:t>5 </a:t>
             </a:r>
             <a:r>
-              <a:rPr kumimoji="1" lang="ja-JP" altLang="en-US" smtClean="0"/>
+              <a:rPr kumimoji="1" lang="ja-JP" altLang="en-US"/>
               <a:t>レベル</a:t>
             </a:r>
-            <a:endParaRPr kumimoji="1" lang="ja-JP" altLang="en-US"/>
           </a:p>
         </p:txBody>
       </p:sp>
@@ -705,7 +715,7 @@
           <a:p>
             <a:fld id="{01AC0B91-4105-FC41-AF23-562AED5B73ED}" type="datetimeFigureOut">
               <a:rPr kumimoji="1" lang="ja-JP" altLang="en-US" smtClean="0"/>
-              <a:t>17/09/18</a:t>
+              <a:t>2026/9/28</a:t>
             </a:fld>
             <a:endParaRPr kumimoji="1" lang="ja-JP" altLang="en-US"/>
           </a:p>
@@ -799,10 +809,9 @@
           <a:lstStyle/>
           <a:p>
             <a:r>
-              <a:rPr kumimoji="1" lang="ja-JP" altLang="en-US" smtClean="0"/>
+              <a:rPr kumimoji="1" lang="ja-JP" altLang="en-US"/>
               <a:t>マスター タイトルの書式設定</a:t>
             </a:r>
-            <a:endParaRPr kumimoji="1" lang="ja-JP" altLang="en-US"/>
           </a:p>
         </p:txBody>
       </p:sp>
@@ -823,70 +832,69 @@
           <a:p>
             <a:pPr lvl="0"/>
             <a:r>
-              <a:rPr kumimoji="1" lang="ja-JP" altLang="en-US" smtClean="0"/>
+              <a:rPr kumimoji="1" lang="ja-JP" altLang="en-US"/>
               <a:t>マスター テキストの書式設定</a:t>
             </a:r>
           </a:p>
           <a:p>
             <a:pPr lvl="1"/>
             <a:r>
-              <a:rPr kumimoji="1" lang="ja-JP" altLang="en-US" smtClean="0"/>
+              <a:rPr kumimoji="1" lang="ja-JP" altLang="en-US"/>
               <a:t>第 </a:t>
             </a:r>
             <a:r>
-              <a:rPr kumimoji="1" lang="en-US" altLang="ja-JP" smtClean="0"/>
+              <a:rPr kumimoji="1" lang="en-US" altLang="ja-JP"/>
               <a:t>2 </a:t>
             </a:r>
             <a:r>
-              <a:rPr kumimoji="1" lang="ja-JP" altLang="en-US" smtClean="0"/>
+              <a:rPr kumimoji="1" lang="ja-JP" altLang="en-US"/>
               <a:t>レベル</a:t>
             </a:r>
           </a:p>
           <a:p>
             <a:pPr lvl="2"/>
             <a:r>
-              <a:rPr kumimoji="1" lang="ja-JP" altLang="en-US" smtClean="0"/>
+              <a:rPr kumimoji="1" lang="ja-JP" altLang="en-US"/>
               <a:t>第 </a:t>
             </a:r>
             <a:r>
-              <a:rPr kumimoji="1" lang="en-US" altLang="ja-JP" smtClean="0"/>
+              <a:rPr kumimoji="1" lang="en-US" altLang="ja-JP"/>
               <a:t>3 </a:t>
             </a:r>
             <a:r>
-              <a:rPr kumimoji="1" lang="ja-JP" altLang="en-US" smtClean="0"/>
+              <a:rPr kumimoji="1" lang="ja-JP" altLang="en-US"/>
               <a:t>レベル</a:t>
             </a:r>
           </a:p>
           <a:p>
             <a:pPr lvl="3"/>
             <a:r>
-              <a:rPr kumimoji="1" lang="ja-JP" altLang="en-US" smtClean="0"/>
+              <a:rPr kumimoji="1" lang="ja-JP" altLang="en-US"/>
               <a:t>第 </a:t>
             </a:r>
             <a:r>
-              <a:rPr kumimoji="1" lang="en-US" altLang="ja-JP" smtClean="0"/>
+              <a:rPr kumimoji="1" lang="en-US" altLang="ja-JP"/>
               <a:t>4 </a:t>
             </a:r>
             <a:r>
-              <a:rPr kumimoji="1" lang="ja-JP" altLang="en-US" smtClean="0"/>
+              <a:rPr kumimoji="1" lang="ja-JP" altLang="en-US"/>
               <a:t>レベル</a:t>
             </a:r>
           </a:p>
           <a:p>
             <a:pPr lvl="4"/>
             <a:r>
-              <a:rPr kumimoji="1" lang="ja-JP" altLang="en-US" smtClean="0"/>
+              <a:rPr kumimoji="1" lang="ja-JP" altLang="en-US"/>
               <a:t>第 </a:t>
             </a:r>
             <a:r>
-              <a:rPr kumimoji="1" lang="en-US" altLang="ja-JP" smtClean="0"/>
+              <a:rPr kumimoji="1" lang="en-US" altLang="ja-JP"/>
               <a:t>5 </a:t>
             </a:r>
             <a:r>
-              <a:rPr kumimoji="1" lang="ja-JP" altLang="en-US" smtClean="0"/>
+              <a:rPr kumimoji="1" lang="ja-JP" altLang="en-US"/>
               <a:t>レベル</a:t>
             </a:r>
-            <a:endParaRPr kumimoji="1" lang="ja-JP" altLang="en-US"/>
           </a:p>
         </p:txBody>
       </p:sp>
@@ -907,7 +915,7 @@
           <a:p>
             <a:fld id="{01AC0B91-4105-FC41-AF23-562AED5B73ED}" type="datetimeFigureOut">
               <a:rPr kumimoji="1" lang="ja-JP" altLang="en-US" smtClean="0"/>
-              <a:t>17/09/18</a:t>
+              <a:t>2026/9/28</a:t>
             </a:fld>
             <a:endParaRPr kumimoji="1" lang="ja-JP" altLang="en-US"/>
           </a:p>
@@ -1010,10 +1018,9 @@
           </a:lstStyle>
           <a:p>
             <a:r>
-              <a:rPr kumimoji="1" lang="ja-JP" altLang="en-US" smtClean="0"/>
+              <a:rPr kumimoji="1" lang="ja-JP" altLang="en-US"/>
               <a:t>マスター タイトルの書式設定</a:t>
             </a:r>
-            <a:endParaRPr kumimoji="1" lang="ja-JP" altLang="en-US"/>
           </a:p>
         </p:txBody>
       </p:sp>
@@ -1130,7 +1137,7 @@
           <a:p>
             <a:pPr lvl="0"/>
             <a:r>
-              <a:rPr kumimoji="1" lang="ja-JP" altLang="en-US" smtClean="0"/>
+              <a:rPr kumimoji="1" lang="ja-JP" altLang="en-US"/>
               <a:t>マスター テキストの書式設定</a:t>
             </a:r>
           </a:p>
@@ -1153,7 +1160,7 @@
           <a:p>
             <a:fld id="{01AC0B91-4105-FC41-AF23-562AED5B73ED}" type="datetimeFigureOut">
               <a:rPr kumimoji="1" lang="ja-JP" altLang="en-US" smtClean="0"/>
-              <a:t>17/09/18</a:t>
+              <a:t>2026/9/28</a:t>
             </a:fld>
             <a:endParaRPr kumimoji="1" lang="ja-JP" altLang="en-US"/>
           </a:p>
@@ -1247,10 +1254,9 @@
           <a:lstStyle/>
           <a:p>
             <a:r>
-              <a:rPr kumimoji="1" lang="ja-JP" altLang="en-US" smtClean="0"/>
+              <a:rPr kumimoji="1" lang="ja-JP" altLang="en-US"/>
               <a:t>マスター タイトルの書式設定</a:t>
             </a:r>
-            <a:endParaRPr kumimoji="1" lang="ja-JP" altLang="en-US"/>
           </a:p>
         </p:txBody>
       </p:sp>
@@ -1304,70 +1310,69 @@
           <a:p>
             <a:pPr lvl="0"/>
             <a:r>
-              <a:rPr kumimoji="1" lang="ja-JP" altLang="en-US" smtClean="0"/>
+              <a:rPr kumimoji="1" lang="ja-JP" altLang="en-US"/>
               <a:t>マスター テキストの書式設定</a:t>
             </a:r>
           </a:p>
           <a:p>
             <a:pPr lvl="1"/>
             <a:r>
-              <a:rPr kumimoji="1" lang="ja-JP" altLang="en-US" smtClean="0"/>
+              <a:rPr kumimoji="1" lang="ja-JP" altLang="en-US"/>
               <a:t>第 </a:t>
             </a:r>
             <a:r>
-              <a:rPr kumimoji="1" lang="en-US" altLang="ja-JP" smtClean="0"/>
+              <a:rPr kumimoji="1" lang="en-US" altLang="ja-JP"/>
               <a:t>2 </a:t>
             </a:r>
             <a:r>
-              <a:rPr kumimoji="1" lang="ja-JP" altLang="en-US" smtClean="0"/>
+              <a:rPr kumimoji="1" lang="ja-JP" altLang="en-US"/>
               <a:t>レベル</a:t>
             </a:r>
           </a:p>
           <a:p>
             <a:pPr lvl="2"/>
             <a:r>
-              <a:rPr kumimoji="1" lang="ja-JP" altLang="en-US" smtClean="0"/>
+              <a:rPr kumimoji="1" lang="ja-JP" altLang="en-US"/>
               <a:t>第 </a:t>
             </a:r>
             <a:r>
-              <a:rPr kumimoji="1" lang="en-US" altLang="ja-JP" smtClean="0"/>
+              <a:rPr kumimoji="1" lang="en-US" altLang="ja-JP"/>
               <a:t>3 </a:t>
             </a:r>
             <a:r>
-              <a:rPr kumimoji="1" lang="ja-JP" altLang="en-US" smtClean="0"/>
+              <a:rPr kumimoji="1" lang="ja-JP" altLang="en-US"/>
               <a:t>レベル</a:t>
             </a:r>
           </a:p>
           <a:p>
             <a:pPr lvl="3"/>
             <a:r>
-              <a:rPr kumimoji="1" lang="ja-JP" altLang="en-US" smtClean="0"/>
+              <a:rPr kumimoji="1" lang="ja-JP" altLang="en-US"/>
               <a:t>第 </a:t>
             </a:r>
             <a:r>
-              <a:rPr kumimoji="1" lang="en-US" altLang="ja-JP" smtClean="0"/>
+              <a:rPr kumimoji="1" lang="en-US" altLang="ja-JP"/>
               <a:t>4 </a:t>
             </a:r>
             <a:r>
-              <a:rPr kumimoji="1" lang="ja-JP" altLang="en-US" smtClean="0"/>
+              <a:rPr kumimoji="1" lang="ja-JP" altLang="en-US"/>
               <a:t>レベル</a:t>
             </a:r>
           </a:p>
           <a:p>
             <a:pPr lvl="4"/>
             <a:r>
-              <a:rPr kumimoji="1" lang="ja-JP" altLang="en-US" smtClean="0"/>
+              <a:rPr kumimoji="1" lang="ja-JP" altLang="en-US"/>
               <a:t>第 </a:t>
             </a:r>
             <a:r>
-              <a:rPr kumimoji="1" lang="en-US" altLang="ja-JP" smtClean="0"/>
+              <a:rPr kumimoji="1" lang="en-US" altLang="ja-JP"/>
               <a:t>5 </a:t>
             </a:r>
             <a:r>
-              <a:rPr kumimoji="1" lang="ja-JP" altLang="en-US" smtClean="0"/>
+              <a:rPr kumimoji="1" lang="ja-JP" altLang="en-US"/>
               <a:t>レベル</a:t>
             </a:r>
-            <a:endParaRPr kumimoji="1" lang="ja-JP" altLang="en-US"/>
           </a:p>
         </p:txBody>
       </p:sp>
@@ -1421,70 +1426,69 @@
           <a:p>
             <a:pPr lvl="0"/>
             <a:r>
-              <a:rPr kumimoji="1" lang="ja-JP" altLang="en-US" smtClean="0"/>
+              <a:rPr kumimoji="1" lang="ja-JP" altLang="en-US"/>
               <a:t>マスター テキストの書式設定</a:t>
             </a:r>
           </a:p>
           <a:p>
             <a:pPr lvl="1"/>
             <a:r>
-              <a:rPr kumimoji="1" lang="ja-JP" altLang="en-US" smtClean="0"/>
+              <a:rPr kumimoji="1" lang="ja-JP" altLang="en-US"/>
               <a:t>第 </a:t>
             </a:r>
             <a:r>
-              <a:rPr kumimoji="1" lang="en-US" altLang="ja-JP" smtClean="0"/>
+              <a:rPr kumimoji="1" lang="en-US" altLang="ja-JP"/>
               <a:t>2 </a:t>
             </a:r>
             <a:r>
-              <a:rPr kumimoji="1" lang="ja-JP" altLang="en-US" smtClean="0"/>
+              <a:rPr kumimoji="1" lang="ja-JP" altLang="en-US"/>
               <a:t>レベル</a:t>
             </a:r>
           </a:p>
           <a:p>
             <a:pPr lvl="2"/>
             <a:r>
-              <a:rPr kumimoji="1" lang="ja-JP" altLang="en-US" smtClean="0"/>
+              <a:rPr kumimoji="1" lang="ja-JP" altLang="en-US"/>
               <a:t>第 </a:t>
             </a:r>
             <a:r>
-              <a:rPr kumimoji="1" lang="en-US" altLang="ja-JP" smtClean="0"/>
+              <a:rPr kumimoji="1" lang="en-US" altLang="ja-JP"/>
               <a:t>3 </a:t>
             </a:r>
             <a:r>
-              <a:rPr kumimoji="1" lang="ja-JP" altLang="en-US" smtClean="0"/>
+              <a:rPr kumimoji="1" lang="ja-JP" altLang="en-US"/>
               <a:t>レベル</a:t>
             </a:r>
           </a:p>
           <a:p>
             <a:pPr lvl="3"/>
             <a:r>
-              <a:rPr kumimoji="1" lang="ja-JP" altLang="en-US" smtClean="0"/>
+              <a:rPr kumimoji="1" lang="ja-JP" altLang="en-US"/>
               <a:t>第 </a:t>
             </a:r>
             <a:r>
-              <a:rPr kumimoji="1" lang="en-US" altLang="ja-JP" smtClean="0"/>
+              <a:rPr kumimoji="1" lang="en-US" altLang="ja-JP"/>
               <a:t>4 </a:t>
             </a:r>
             <a:r>
-              <a:rPr kumimoji="1" lang="ja-JP" altLang="en-US" smtClean="0"/>
+              <a:rPr kumimoji="1" lang="ja-JP" altLang="en-US"/>
               <a:t>レベル</a:t>
             </a:r>
           </a:p>
           <a:p>
             <a:pPr lvl="4"/>
             <a:r>
-              <a:rPr kumimoji="1" lang="ja-JP" altLang="en-US" smtClean="0"/>
+              <a:rPr kumimoji="1" lang="ja-JP" altLang="en-US"/>
               <a:t>第 </a:t>
             </a:r>
             <a:r>
-              <a:rPr kumimoji="1" lang="en-US" altLang="ja-JP" smtClean="0"/>
+              <a:rPr kumimoji="1" lang="en-US" altLang="ja-JP"/>
               <a:t>5 </a:t>
             </a:r>
             <a:r>
-              <a:rPr kumimoji="1" lang="ja-JP" altLang="en-US" smtClean="0"/>
+              <a:rPr kumimoji="1" lang="ja-JP" altLang="en-US"/>
               <a:t>レベル</a:t>
             </a:r>
-            <a:endParaRPr kumimoji="1" lang="ja-JP" altLang="en-US"/>
           </a:p>
         </p:txBody>
       </p:sp>
@@ -1505,7 +1509,7 @@
           <a:p>
             <a:fld id="{01AC0B91-4105-FC41-AF23-562AED5B73ED}" type="datetimeFigureOut">
               <a:rPr kumimoji="1" lang="ja-JP" altLang="en-US" smtClean="0"/>
-              <a:t>17/09/18</a:t>
+              <a:t>2026/9/28</a:t>
             </a:fld>
             <a:endParaRPr kumimoji="1" lang="ja-JP" altLang="en-US"/>
           </a:p>
@@ -1603,10 +1607,9 @@
           </a:lstStyle>
           <a:p>
             <a:r>
-              <a:rPr kumimoji="1" lang="ja-JP" altLang="en-US" smtClean="0"/>
+              <a:rPr kumimoji="1" lang="ja-JP" altLang="en-US"/>
               <a:t>マスター タイトルの書式設定</a:t>
             </a:r>
-            <a:endParaRPr kumimoji="1" lang="ja-JP" altLang="en-US"/>
           </a:p>
         </p:txBody>
       </p:sp>
@@ -1669,7 +1672,7 @@
           <a:p>
             <a:pPr lvl="0"/>
             <a:r>
-              <a:rPr kumimoji="1" lang="ja-JP" altLang="en-US" smtClean="0"/>
+              <a:rPr kumimoji="1" lang="ja-JP" altLang="en-US"/>
               <a:t>マスター テキストの書式設定</a:t>
             </a:r>
           </a:p>
@@ -1725,70 +1728,69 @@
           <a:p>
             <a:pPr lvl="0"/>
             <a:r>
-              <a:rPr kumimoji="1" lang="ja-JP" altLang="en-US" smtClean="0"/>
+              <a:rPr kumimoji="1" lang="ja-JP" altLang="en-US"/>
               <a:t>マスター テキストの書式設定</a:t>
             </a:r>
           </a:p>
           <a:p>
             <a:pPr lvl="1"/>
             <a:r>
-              <a:rPr kumimoji="1" lang="ja-JP" altLang="en-US" smtClean="0"/>
+              <a:rPr kumimoji="1" lang="ja-JP" altLang="en-US"/>
               <a:t>第 </a:t>
             </a:r>
             <a:r>
-              <a:rPr kumimoji="1" lang="en-US" altLang="ja-JP" smtClean="0"/>
+              <a:rPr kumimoji="1" lang="en-US" altLang="ja-JP"/>
               <a:t>2 </a:t>
             </a:r>
             <a:r>
-              <a:rPr kumimoji="1" lang="ja-JP" altLang="en-US" smtClean="0"/>
+              <a:rPr kumimoji="1" lang="ja-JP" altLang="en-US"/>
               <a:t>レベル</a:t>
             </a:r>
           </a:p>
           <a:p>
             <a:pPr lvl="2"/>
             <a:r>
-              <a:rPr kumimoji="1" lang="ja-JP" altLang="en-US" smtClean="0"/>
+              <a:rPr kumimoji="1" lang="ja-JP" altLang="en-US"/>
               <a:t>第 </a:t>
             </a:r>
             <a:r>
-              <a:rPr kumimoji="1" lang="en-US" altLang="ja-JP" smtClean="0"/>
+              <a:rPr kumimoji="1" lang="en-US" altLang="ja-JP"/>
               <a:t>3 </a:t>
             </a:r>
             <a:r>
-              <a:rPr kumimoji="1" lang="ja-JP" altLang="en-US" smtClean="0"/>
+              <a:rPr kumimoji="1" lang="ja-JP" altLang="en-US"/>
               <a:t>レベル</a:t>
             </a:r>
           </a:p>
           <a:p>
             <a:pPr lvl="3"/>
             <a:r>
-              <a:rPr kumimoji="1" lang="ja-JP" altLang="en-US" smtClean="0"/>
+              <a:rPr kumimoji="1" lang="ja-JP" altLang="en-US"/>
               <a:t>第 </a:t>
             </a:r>
             <a:r>
-              <a:rPr kumimoji="1" lang="en-US" altLang="ja-JP" smtClean="0"/>
+              <a:rPr kumimoji="1" lang="en-US" altLang="ja-JP"/>
               <a:t>4 </a:t>
             </a:r>
             <a:r>
-              <a:rPr kumimoji="1" lang="ja-JP" altLang="en-US" smtClean="0"/>
+              <a:rPr kumimoji="1" lang="ja-JP" altLang="en-US"/>
               <a:t>レベル</a:t>
             </a:r>
           </a:p>
           <a:p>
             <a:pPr lvl="4"/>
             <a:r>
-              <a:rPr kumimoji="1" lang="ja-JP" altLang="en-US" smtClean="0"/>
+              <a:rPr kumimoji="1" lang="ja-JP" altLang="en-US"/>
               <a:t>第 </a:t>
             </a:r>
             <a:r>
-              <a:rPr kumimoji="1" lang="en-US" altLang="ja-JP" smtClean="0"/>
+              <a:rPr kumimoji="1" lang="en-US" altLang="ja-JP"/>
               <a:t>5 </a:t>
             </a:r>
             <a:r>
-              <a:rPr kumimoji="1" lang="ja-JP" altLang="en-US" smtClean="0"/>
+              <a:rPr kumimoji="1" lang="ja-JP" altLang="en-US"/>
               <a:t>レベル</a:t>
             </a:r>
-            <a:endParaRPr kumimoji="1" lang="ja-JP" altLang="en-US"/>
           </a:p>
         </p:txBody>
       </p:sp>
@@ -1851,7 +1853,7 @@
           <a:p>
             <a:pPr lvl="0"/>
             <a:r>
-              <a:rPr kumimoji="1" lang="ja-JP" altLang="en-US" smtClean="0"/>
+              <a:rPr kumimoji="1" lang="ja-JP" altLang="en-US"/>
               <a:t>マスター テキストの書式設定</a:t>
             </a:r>
           </a:p>
@@ -1907,70 +1909,69 @@
           <a:p>
             <a:pPr lvl="0"/>
             <a:r>
-              <a:rPr kumimoji="1" lang="ja-JP" altLang="en-US" smtClean="0"/>
+              <a:rPr kumimoji="1" lang="ja-JP" altLang="en-US"/>
               <a:t>マスター テキストの書式設定</a:t>
             </a:r>
           </a:p>
           <a:p>
             <a:pPr lvl="1"/>
             <a:r>
-              <a:rPr kumimoji="1" lang="ja-JP" altLang="en-US" smtClean="0"/>
+              <a:rPr kumimoji="1" lang="ja-JP" altLang="en-US"/>
               <a:t>第 </a:t>
             </a:r>
             <a:r>
-              <a:rPr kumimoji="1" lang="en-US" altLang="ja-JP" smtClean="0"/>
+              <a:rPr kumimoji="1" lang="en-US" altLang="ja-JP"/>
               <a:t>2 </a:t>
             </a:r>
             <a:r>
-              <a:rPr kumimoji="1" lang="ja-JP" altLang="en-US" smtClean="0"/>
+              <a:rPr kumimoji="1" lang="ja-JP" altLang="en-US"/>
               <a:t>レベル</a:t>
             </a:r>
           </a:p>
           <a:p>
             <a:pPr lvl="2"/>
             <a:r>
-              <a:rPr kumimoji="1" lang="ja-JP" altLang="en-US" smtClean="0"/>
+              <a:rPr kumimoji="1" lang="ja-JP" altLang="en-US"/>
               <a:t>第 </a:t>
             </a:r>
             <a:r>
-              <a:rPr kumimoji="1" lang="en-US" altLang="ja-JP" smtClean="0"/>
+              <a:rPr kumimoji="1" lang="en-US" altLang="ja-JP"/>
               <a:t>3 </a:t>
             </a:r>
             <a:r>
-              <a:rPr kumimoji="1" lang="ja-JP" altLang="en-US" smtClean="0"/>
+              <a:rPr kumimoji="1" lang="ja-JP" altLang="en-US"/>
               <a:t>レベル</a:t>
             </a:r>
           </a:p>
           <a:p>
             <a:pPr lvl="3"/>
             <a:r>
-              <a:rPr kumimoji="1" lang="ja-JP" altLang="en-US" smtClean="0"/>
+              <a:rPr kumimoji="1" lang="ja-JP" altLang="en-US"/>
               <a:t>第 </a:t>
             </a:r>
             <a:r>
-              <a:rPr kumimoji="1" lang="en-US" altLang="ja-JP" smtClean="0"/>
+              <a:rPr kumimoji="1" lang="en-US" altLang="ja-JP"/>
               <a:t>4 </a:t>
             </a:r>
             <a:r>
-              <a:rPr kumimoji="1" lang="ja-JP" altLang="en-US" smtClean="0"/>
+              <a:rPr kumimoji="1" lang="ja-JP" altLang="en-US"/>
               <a:t>レベル</a:t>
             </a:r>
           </a:p>
           <a:p>
             <a:pPr lvl="4"/>
             <a:r>
-              <a:rPr kumimoji="1" lang="ja-JP" altLang="en-US" smtClean="0"/>
+              <a:rPr kumimoji="1" lang="ja-JP" altLang="en-US"/>
               <a:t>第 </a:t>
             </a:r>
             <a:r>
-              <a:rPr kumimoji="1" lang="en-US" altLang="ja-JP" smtClean="0"/>
+              <a:rPr kumimoji="1" lang="en-US" altLang="ja-JP"/>
               <a:t>5 </a:t>
             </a:r>
             <a:r>
-              <a:rPr kumimoji="1" lang="ja-JP" altLang="en-US" smtClean="0"/>
+              <a:rPr kumimoji="1" lang="ja-JP" altLang="en-US"/>
               <a:t>レベル</a:t>
             </a:r>
-            <a:endParaRPr kumimoji="1" lang="ja-JP" altLang="en-US"/>
           </a:p>
         </p:txBody>
       </p:sp>
@@ -1991,7 +1992,7 @@
           <a:p>
             <a:fld id="{01AC0B91-4105-FC41-AF23-562AED5B73ED}" type="datetimeFigureOut">
               <a:rPr kumimoji="1" lang="ja-JP" altLang="en-US" smtClean="0"/>
-              <a:t>17/09/18</a:t>
+              <a:t>2026/9/28</a:t>
             </a:fld>
             <a:endParaRPr kumimoji="1" lang="ja-JP" altLang="en-US"/>
           </a:p>
@@ -2085,10 +2086,9 @@
           <a:lstStyle/>
           <a:p>
             <a:r>
-              <a:rPr kumimoji="1" lang="ja-JP" altLang="en-US" smtClean="0"/>
+              <a:rPr kumimoji="1" lang="ja-JP" altLang="en-US"/>
               <a:t>マスター タイトルの書式設定</a:t>
             </a:r>
-            <a:endParaRPr kumimoji="1" lang="ja-JP" altLang="en-US"/>
           </a:p>
         </p:txBody>
       </p:sp>
@@ -2109,7 +2109,7 @@
           <a:p>
             <a:fld id="{01AC0B91-4105-FC41-AF23-562AED5B73ED}" type="datetimeFigureOut">
               <a:rPr kumimoji="1" lang="ja-JP" altLang="en-US" smtClean="0"/>
-              <a:t>17/09/18</a:t>
+              <a:t>2026/9/28</a:t>
             </a:fld>
             <a:endParaRPr kumimoji="1" lang="ja-JP" altLang="en-US"/>
           </a:p>
@@ -2204,7 +2204,7 @@
           <a:p>
             <a:fld id="{01AC0B91-4105-FC41-AF23-562AED5B73ED}" type="datetimeFigureOut">
               <a:rPr kumimoji="1" lang="ja-JP" altLang="en-US" smtClean="0"/>
-              <a:t>17/09/18</a:t>
+              <a:t>2026/9/28</a:t>
             </a:fld>
             <a:endParaRPr kumimoji="1" lang="ja-JP" altLang="en-US"/>
           </a:p>
@@ -2307,10 +2307,9 @@
           </a:lstStyle>
           <a:p>
             <a:r>
-              <a:rPr kumimoji="1" lang="ja-JP" altLang="en-US" smtClean="0"/>
+              <a:rPr kumimoji="1" lang="ja-JP" altLang="en-US"/>
               <a:t>マスター タイトルの書式設定</a:t>
             </a:r>
-            <a:endParaRPr kumimoji="1" lang="ja-JP" altLang="en-US"/>
           </a:p>
         </p:txBody>
       </p:sp>
@@ -2364,70 +2363,69 @@
           <a:p>
             <a:pPr lvl="0"/>
             <a:r>
-              <a:rPr kumimoji="1" lang="ja-JP" altLang="en-US" smtClean="0"/>
+              <a:rPr kumimoji="1" lang="ja-JP" altLang="en-US"/>
               <a:t>マスター テキストの書式設定</a:t>
             </a:r>
           </a:p>
           <a:p>
             <a:pPr lvl="1"/>
             <a:r>
-              <a:rPr kumimoji="1" lang="ja-JP" altLang="en-US" smtClean="0"/>
+              <a:rPr kumimoji="1" lang="ja-JP" altLang="en-US"/>
               <a:t>第 </a:t>
             </a:r>
             <a:r>
-              <a:rPr kumimoji="1" lang="en-US" altLang="ja-JP" smtClean="0"/>
+              <a:rPr kumimoji="1" lang="en-US" altLang="ja-JP"/>
               <a:t>2 </a:t>
             </a:r>
             <a:r>
-              <a:rPr kumimoji="1" lang="ja-JP" altLang="en-US" smtClean="0"/>
+              <a:rPr kumimoji="1" lang="ja-JP" altLang="en-US"/>
               <a:t>レベル</a:t>
             </a:r>
           </a:p>
           <a:p>
             <a:pPr lvl="2"/>
             <a:r>
-              <a:rPr kumimoji="1" lang="ja-JP" altLang="en-US" smtClean="0"/>
+              <a:rPr kumimoji="1" lang="ja-JP" altLang="en-US"/>
               <a:t>第 </a:t>
             </a:r>
             <a:r>
-              <a:rPr kumimoji="1" lang="en-US" altLang="ja-JP" smtClean="0"/>
+              <a:rPr kumimoji="1" lang="en-US" altLang="ja-JP"/>
               <a:t>3 </a:t>
             </a:r>
             <a:r>
-              <a:rPr kumimoji="1" lang="ja-JP" altLang="en-US" smtClean="0"/>
+              <a:rPr kumimoji="1" lang="ja-JP" altLang="en-US"/>
               <a:t>レベル</a:t>
             </a:r>
           </a:p>
           <a:p>
             <a:pPr lvl="3"/>
             <a:r>
-              <a:rPr kumimoji="1" lang="ja-JP" altLang="en-US" smtClean="0"/>
+              <a:rPr kumimoji="1" lang="ja-JP" altLang="en-US"/>
               <a:t>第 </a:t>
             </a:r>
             <a:r>
-              <a:rPr kumimoji="1" lang="en-US" altLang="ja-JP" smtClean="0"/>
+              <a:rPr kumimoji="1" lang="en-US" altLang="ja-JP"/>
               <a:t>4 </a:t>
             </a:r>
             <a:r>
-              <a:rPr kumimoji="1" lang="ja-JP" altLang="en-US" smtClean="0"/>
+              <a:rPr kumimoji="1" lang="ja-JP" altLang="en-US"/>
               <a:t>レベル</a:t>
             </a:r>
           </a:p>
           <a:p>
             <a:pPr lvl="4"/>
             <a:r>
-              <a:rPr kumimoji="1" lang="ja-JP" altLang="en-US" smtClean="0"/>
+              <a:rPr kumimoji="1" lang="ja-JP" altLang="en-US"/>
               <a:t>第 </a:t>
             </a:r>
             <a:r>
-              <a:rPr kumimoji="1" lang="en-US" altLang="ja-JP" smtClean="0"/>
+              <a:rPr kumimoji="1" lang="en-US" altLang="ja-JP"/>
               <a:t>5 </a:t>
             </a:r>
             <a:r>
-              <a:rPr kumimoji="1" lang="ja-JP" altLang="en-US" smtClean="0"/>
+              <a:rPr kumimoji="1" lang="ja-JP" altLang="en-US"/>
               <a:t>レベル</a:t>
             </a:r>
-            <a:endParaRPr kumimoji="1" lang="ja-JP" altLang="en-US"/>
           </a:p>
         </p:txBody>
       </p:sp>
@@ -2490,7 +2488,7 @@
           <a:p>
             <a:pPr lvl="0"/>
             <a:r>
-              <a:rPr kumimoji="1" lang="ja-JP" altLang="en-US" smtClean="0"/>
+              <a:rPr kumimoji="1" lang="ja-JP" altLang="en-US"/>
               <a:t>マスター テキストの書式設定</a:t>
             </a:r>
           </a:p>
@@ -2513,7 +2511,7 @@
           <a:p>
             <a:fld id="{01AC0B91-4105-FC41-AF23-562AED5B73ED}" type="datetimeFigureOut">
               <a:rPr kumimoji="1" lang="ja-JP" altLang="en-US" smtClean="0"/>
-              <a:t>17/09/18</a:t>
+              <a:t>2026/9/28</a:t>
             </a:fld>
             <a:endParaRPr kumimoji="1" lang="ja-JP" altLang="en-US"/>
           </a:p>
@@ -2616,10 +2614,9 @@
           </a:lstStyle>
           <a:p>
             <a:r>
-              <a:rPr kumimoji="1" lang="ja-JP" altLang="en-US" smtClean="0"/>
+              <a:rPr kumimoji="1" lang="ja-JP" altLang="en-US"/>
               <a:t>マスター タイトルの書式設定</a:t>
             </a:r>
-            <a:endParaRPr kumimoji="1" lang="ja-JP" altLang="en-US"/>
           </a:p>
         </p:txBody>
       </p:sp>
@@ -2743,7 +2740,7 @@
           <a:p>
             <a:pPr lvl="0"/>
             <a:r>
-              <a:rPr kumimoji="1" lang="ja-JP" altLang="en-US" smtClean="0"/>
+              <a:rPr kumimoji="1" lang="ja-JP" altLang="en-US"/>
               <a:t>マスター テキストの書式設定</a:t>
             </a:r>
           </a:p>
@@ -2766,7 +2763,7 @@
           <a:p>
             <a:fld id="{01AC0B91-4105-FC41-AF23-562AED5B73ED}" type="datetimeFigureOut">
               <a:rPr kumimoji="1" lang="ja-JP" altLang="en-US" smtClean="0"/>
-              <a:t>17/09/18</a:t>
+              <a:t>2026/9/28</a:t>
             </a:fld>
             <a:endParaRPr kumimoji="1" lang="ja-JP" altLang="en-US"/>
           </a:p>
@@ -2875,10 +2872,9 @@
           <a:lstStyle/>
           <a:p>
             <a:r>
-              <a:rPr kumimoji="1" lang="ja-JP" altLang="en-US" smtClean="0"/>
+              <a:rPr kumimoji="1" lang="ja-JP" altLang="en-US"/>
               <a:t>マスター タイトルの書式設定</a:t>
             </a:r>
-            <a:endParaRPr kumimoji="1" lang="ja-JP" altLang="en-US"/>
           </a:p>
         </p:txBody>
       </p:sp>
@@ -2909,70 +2905,69 @@
           <a:p>
             <a:pPr lvl="0"/>
             <a:r>
-              <a:rPr kumimoji="1" lang="ja-JP" altLang="en-US" smtClean="0"/>
+              <a:rPr kumimoji="1" lang="ja-JP" altLang="en-US"/>
               <a:t>マスター テキストの書式設定</a:t>
             </a:r>
           </a:p>
           <a:p>
             <a:pPr lvl="1"/>
             <a:r>
-              <a:rPr kumimoji="1" lang="ja-JP" altLang="en-US" smtClean="0"/>
+              <a:rPr kumimoji="1" lang="ja-JP" altLang="en-US"/>
               <a:t>第 </a:t>
             </a:r>
             <a:r>
-              <a:rPr kumimoji="1" lang="en-US" altLang="ja-JP" smtClean="0"/>
+              <a:rPr kumimoji="1" lang="en-US" altLang="ja-JP"/>
               <a:t>2 </a:t>
             </a:r>
             <a:r>
-              <a:rPr kumimoji="1" lang="ja-JP" altLang="en-US" smtClean="0"/>
+              <a:rPr kumimoji="1" lang="ja-JP" altLang="en-US"/>
               <a:t>レベル</a:t>
             </a:r>
           </a:p>
           <a:p>
             <a:pPr lvl="2"/>
             <a:r>
-              <a:rPr kumimoji="1" lang="ja-JP" altLang="en-US" smtClean="0"/>
+              <a:rPr kumimoji="1" lang="ja-JP" altLang="en-US"/>
               <a:t>第 </a:t>
             </a:r>
             <a:r>
-              <a:rPr kumimoji="1" lang="en-US" altLang="ja-JP" smtClean="0"/>
+              <a:rPr kumimoji="1" lang="en-US" altLang="ja-JP"/>
               <a:t>3 </a:t>
             </a:r>
             <a:r>
-              <a:rPr kumimoji="1" lang="ja-JP" altLang="en-US" smtClean="0"/>
+              <a:rPr kumimoji="1" lang="ja-JP" altLang="en-US"/>
               <a:t>レベル</a:t>
             </a:r>
           </a:p>
           <a:p>
             <a:pPr lvl="3"/>
             <a:r>
-              <a:rPr kumimoji="1" lang="ja-JP" altLang="en-US" smtClean="0"/>
+              <a:rPr kumimoji="1" lang="ja-JP" altLang="en-US"/>
               <a:t>第 </a:t>
             </a:r>
             <a:r>
-              <a:rPr kumimoji="1" lang="en-US" altLang="ja-JP" smtClean="0"/>
+              <a:rPr kumimoji="1" lang="en-US" altLang="ja-JP"/>
               <a:t>4 </a:t>
             </a:r>
             <a:r>
-              <a:rPr kumimoji="1" lang="ja-JP" altLang="en-US" smtClean="0"/>
+              <a:rPr kumimoji="1" lang="ja-JP" altLang="en-US"/>
               <a:t>レベル</a:t>
             </a:r>
           </a:p>
           <a:p>
             <a:pPr lvl="4"/>
             <a:r>
-              <a:rPr kumimoji="1" lang="ja-JP" altLang="en-US" smtClean="0"/>
+              <a:rPr kumimoji="1" lang="ja-JP" altLang="en-US"/>
               <a:t>第 </a:t>
             </a:r>
             <a:r>
-              <a:rPr kumimoji="1" lang="en-US" altLang="ja-JP" smtClean="0"/>
+              <a:rPr kumimoji="1" lang="en-US" altLang="ja-JP"/>
               <a:t>5 </a:t>
             </a:r>
             <a:r>
-              <a:rPr kumimoji="1" lang="ja-JP" altLang="en-US" smtClean="0"/>
+              <a:rPr kumimoji="1" lang="ja-JP" altLang="en-US"/>
               <a:t>レベル</a:t>
             </a:r>
-            <a:endParaRPr kumimoji="1" lang="ja-JP" altLang="en-US"/>
           </a:p>
         </p:txBody>
       </p:sp>
@@ -3011,7 +3006,7 @@
           <a:p>
             <a:fld id="{01AC0B91-4105-FC41-AF23-562AED5B73ED}" type="datetimeFigureOut">
               <a:rPr kumimoji="1" lang="ja-JP" altLang="en-US" smtClean="0"/>
-              <a:t>17/09/18</a:t>
+              <a:t>2026/9/28</a:t>
             </a:fld>
             <a:endParaRPr kumimoji="1" lang="ja-JP" altLang="en-US"/>
           </a:p>
@@ -3407,10 +3402,9 @@
           <a:lstStyle/>
           <a:p>
             <a:r>
-              <a:rPr kumimoji="1" lang="ja-JP" altLang="en-US" dirty="0" smtClean="0"/>
+              <a:rPr kumimoji="1" lang="ja-JP" altLang="en-US" dirty="0"/>
               <a:t>プログラミング言語論</a:t>
             </a:r>
-            <a:endParaRPr kumimoji="1" lang="ja-JP" altLang="en-US" dirty="0"/>
           </a:p>
         </p:txBody>
       </p:sp>
@@ -3422,7 +3416,7 @@
         </p:nvSpPr>
         <p:spPr>
           <a:xfrm>
-            <a:off x="2373570" y="5116286"/>
+            <a:off x="2448511" y="5116286"/>
             <a:ext cx="4173985" cy="584776"/>
           </a:xfrm>
           <a:prstGeom prst="rect">
@@ -3438,16 +3432,12 @@
           <a:p>
             <a:pPr algn="ctr"/>
             <a:r>
-              <a:rPr kumimoji="1" lang="ja-JP" altLang="en-US" sz="3200" dirty="0" smtClean="0"/>
-              <a:t>情報工学科</a:t>
-            </a:r>
-            <a:r>
-              <a:rPr kumimoji="1" lang="en-US" altLang="ja-JP" sz="3200" dirty="0" smtClean="0"/>
-              <a:t>  </a:t>
-            </a:r>
-            <a:r>
-              <a:rPr lang="ja-JP" altLang="en-US" sz="3200" dirty="0" smtClean="0"/>
-              <a:t>篠埜　功</a:t>
+              <a:rPr lang="ja-JP" altLang="en-US" sz="3200"/>
+              <a:t>篠埜　</a:t>
+            </a:r>
+            <a:r>
+              <a:rPr lang="ja-JP" altLang="en-US" sz="3200" dirty="0"/>
+              <a:t>功</a:t>
             </a:r>
             <a:endParaRPr kumimoji="1" lang="ja-JP" altLang="en-US" sz="3200" dirty="0"/>
           </a:p>
@@ -3480,38 +3470,33 @@
               <a:t>第</a:t>
             </a:r>
             <a:r>
-              <a:rPr lang="en-US" altLang="ja-JP" sz="3200" dirty="0" smtClean="0"/>
+              <a:rPr lang="en-US" altLang="ja-JP" sz="3200" dirty="0"/>
               <a:t>11</a:t>
             </a:r>
             <a:r>
-              <a:rPr lang="ja-JP" altLang="en-US" sz="3200" dirty="0" smtClean="0"/>
+              <a:rPr lang="ja-JP" altLang="en-US" sz="3200" dirty="0"/>
               <a:t>回</a:t>
             </a:r>
             <a:r>
-              <a:rPr lang="en-US" altLang="ja-JP" sz="3200" dirty="0" smtClean="0"/>
+              <a:rPr lang="en-US" altLang="ja-JP" sz="3200" dirty="0"/>
               <a:t> </a:t>
             </a:r>
             <a:r>
-              <a:rPr lang="ja-JP" altLang="en-US" sz="3200" dirty="0" smtClean="0"/>
+              <a:rPr lang="ja-JP" altLang="en-US" sz="3200" dirty="0"/>
               <a:t>論理型プログラミングの補足</a:t>
             </a:r>
-            <a:endParaRPr lang="en-US" altLang="ja-JP" sz="3200" dirty="0" smtClean="0"/>
+            <a:endParaRPr lang="en-US" altLang="ja-JP" sz="3200" dirty="0"/>
           </a:p>
           <a:p>
             <a:pPr algn="ctr"/>
             <a:r>
               <a:rPr lang="en-US" altLang="ja-JP" sz="3200" dirty="0"/>
-              <a:t>p</a:t>
-            </a:r>
-            <a:r>
-              <a:rPr lang="en-US" altLang="ja-JP" sz="3200" dirty="0" smtClean="0"/>
-              <a:t>refix, suffix</a:t>
-            </a:r>
-            <a:r>
-              <a:rPr lang="ja-JP" altLang="en-US" sz="3200" dirty="0" smtClean="0"/>
+              <a:t>prefix, suffix</a:t>
+            </a:r>
+            <a:r>
+              <a:rPr lang="ja-JP" altLang="en-US" sz="3200" dirty="0"/>
               <a:t>の定義</a:t>
             </a:r>
-            <a:endParaRPr lang="ja-JP" altLang="en-US" sz="3200" dirty="0"/>
           </a:p>
         </p:txBody>
       </p:sp>
@@ -3525,13 +3510,6 @@
   <p:clrMapOvr>
     <a:masterClrMapping/>
   </p:clrMapOvr>
-  <p:timing>
-    <p:tnLst>
-      <p:par>
-        <p:cTn xmlns:p14="http://schemas.microsoft.com/office/powerpoint/2010/main" id="1" dur="indefinite" restart="never" nodeType="tmRoot"/>
-      </p:par>
-    </p:tnLst>
-  </p:timing>
 </p:sld>
 </file>
 
@@ -3568,7 +3546,7 @@
           <a:lstStyle/>
           <a:p>
             <a:r>
-              <a:rPr kumimoji="1" lang="en-US" altLang="ja-JP" dirty="0" smtClean="0"/>
+              <a:rPr kumimoji="1" lang="en-US" altLang="ja-JP" dirty="0"/>
               <a:t>Prefix, suffix</a:t>
             </a:r>
             <a:endParaRPr kumimoji="1" lang="ja-JP" altLang="en-US" dirty="0"/>
@@ -3598,22 +3576,22 @@
           <a:lstStyle/>
           <a:p>
             <a:r>
-              <a:rPr lang="en-US" altLang="en-US" dirty="0" smtClean="0"/>
+              <a:rPr lang="en-US" altLang="en-US" dirty="0"/>
               <a:t>論理型プログラミングの講義資料のp.21</a:t>
             </a:r>
             <a:r>
-              <a:rPr lang="ja-JP" altLang="en-US" dirty="0" smtClean="0"/>
+              <a:rPr lang="ja-JP" altLang="en-US" dirty="0"/>
               <a:t>の</a:t>
             </a:r>
             <a:r>
-              <a:rPr lang="en-US" altLang="ja-JP" dirty="0" smtClean="0"/>
+              <a:rPr lang="en-US" altLang="ja-JP" dirty="0"/>
               <a:t>prefix, suffix</a:t>
             </a:r>
             <a:r>
-              <a:rPr lang="ja-JP" altLang="en-US" dirty="0" smtClean="0"/>
+              <a:rPr lang="ja-JP" altLang="en-US" dirty="0"/>
               <a:t>は以下のように定義される述語である。</a:t>
             </a:r>
-            <a:endParaRPr lang="en-US" altLang="ja-JP" dirty="0" smtClean="0"/>
+            <a:endParaRPr lang="en-US" altLang="ja-JP" dirty="0"/>
           </a:p>
         </p:txBody>
       </p:sp>
@@ -3641,21 +3619,13 @@
           <a:p>
             <a:r>
               <a:rPr lang="en-US" altLang="ja-JP" sz="2800" dirty="0"/>
-              <a:t> </a:t>
-            </a:r>
-            <a:r>
-              <a:rPr lang="en-US" altLang="ja-JP" sz="2800" dirty="0" smtClean="0"/>
-              <a:t>prefix(X,Y) :- append(X,Z,Y).</a:t>
+              <a:t> prefix(X,Y) :- append(X,Z,Y).</a:t>
             </a:r>
           </a:p>
           <a:p>
             <a:r>
               <a:rPr kumimoji="1" lang="en-US" altLang="ja-JP" sz="2800" dirty="0"/>
-              <a:t> </a:t>
-            </a:r>
-            <a:r>
-              <a:rPr kumimoji="1" lang="en-US" altLang="ja-JP" sz="2800" dirty="0" smtClean="0"/>
-              <a:t>suffix(X,Y) :- append(Z,X,Y).</a:t>
+              <a:t> suffix(X,Y) :- append(Z,X,Y).</a:t>
             </a:r>
             <a:endParaRPr kumimoji="1" lang="ja-JP" altLang="en-US" sz="2800" dirty="0"/>
           </a:p>
@@ -3684,30 +3654,29 @@
           <a:lstStyle/>
           <a:p>
             <a:r>
-              <a:rPr lang="ja-JP" altLang="en-US" sz="2800" dirty="0" smtClean="0"/>
+              <a:rPr lang="ja-JP" altLang="en-US" sz="2800" dirty="0"/>
               <a:t>（注）</a:t>
             </a:r>
             <a:r>
-              <a:rPr lang="en-US" altLang="ja-JP" sz="2800" dirty="0" smtClean="0"/>
+              <a:rPr lang="en-US" altLang="ja-JP" sz="2800" dirty="0"/>
               <a:t>a</a:t>
             </a:r>
             <a:r>
-              <a:rPr kumimoji="1" lang="en-US" altLang="ja-JP" sz="2800" dirty="0" smtClean="0"/>
+              <a:rPr kumimoji="1" lang="en-US" altLang="ja-JP" sz="2800" dirty="0"/>
               <a:t>ppend</a:t>
             </a:r>
             <a:r>
-              <a:rPr kumimoji="1" lang="ja-JP" altLang="en-US" sz="2800" dirty="0" smtClean="0"/>
+              <a:rPr kumimoji="1" lang="ja-JP" altLang="en-US" sz="2800" dirty="0"/>
               <a:t>は、講義資料の</a:t>
             </a:r>
             <a:r>
-              <a:rPr kumimoji="1" lang="en-US" altLang="ja-JP" sz="2800" dirty="0" smtClean="0"/>
+              <a:rPr kumimoji="1" lang="en-US" altLang="ja-JP" sz="2800" dirty="0"/>
               <a:t>p.6</a:t>
             </a:r>
             <a:r>
-              <a:rPr kumimoji="1" lang="ja-JP" altLang="en-US" sz="2800" dirty="0" smtClean="0"/>
+              <a:rPr kumimoji="1" lang="ja-JP" altLang="en-US" sz="2800" dirty="0"/>
               <a:t>に定義されている述語である。</a:t>
             </a:r>
-            <a:endParaRPr kumimoji="1" lang="ja-JP" altLang="en-US" sz="2800" dirty="0"/>
           </a:p>
         </p:txBody>
       </p:sp>
@@ -3738,59 +3707,59 @@
               <a:t>p</a:t>
             </a:r>
             <a:r>
-              <a:rPr kumimoji="1" lang="en-US" altLang="ja-JP" sz="2800" dirty="0" smtClean="0"/>
+              <a:rPr kumimoji="1" lang="en-US" altLang="ja-JP" sz="2800" dirty="0"/>
               <a:t>refix</a:t>
             </a:r>
             <a:r>
-              <a:rPr kumimoji="1" lang="ja-JP" altLang="en-US" sz="2800" dirty="0" smtClean="0"/>
+              <a:rPr kumimoji="1" lang="ja-JP" altLang="en-US" sz="2800" dirty="0"/>
               <a:t>（</a:t>
             </a:r>
             <a:r>
-              <a:rPr kumimoji="1" lang="en-US" altLang="ja-JP" sz="2800" dirty="0" smtClean="0"/>
+              <a:rPr kumimoji="1" lang="en-US" altLang="ja-JP" sz="2800" dirty="0"/>
               <a:t>X,Y)</a:t>
             </a:r>
             <a:r>
-              <a:rPr kumimoji="1" lang="ja-JP" altLang="en-US" sz="2800" dirty="0" smtClean="0"/>
+              <a:rPr kumimoji="1" lang="ja-JP" altLang="en-US" sz="2800" dirty="0"/>
               <a:t>はリスト</a:t>
             </a:r>
             <a:r>
-              <a:rPr kumimoji="1" lang="en-US" altLang="ja-JP" sz="2800" dirty="0" smtClean="0"/>
+              <a:rPr kumimoji="1" lang="en-US" altLang="ja-JP" sz="2800" dirty="0"/>
               <a:t>X</a:t>
             </a:r>
             <a:r>
-              <a:rPr kumimoji="1" lang="ja-JP" altLang="en-US" sz="2800" dirty="0" smtClean="0"/>
+              <a:rPr kumimoji="1" lang="ja-JP" altLang="en-US" sz="2800" dirty="0"/>
               <a:t>がリスト</a:t>
             </a:r>
             <a:r>
-              <a:rPr kumimoji="1" lang="en-US" altLang="ja-JP" sz="2800" dirty="0" smtClean="0"/>
+              <a:rPr kumimoji="1" lang="en-US" altLang="ja-JP" sz="2800" dirty="0"/>
               <a:t>Y</a:t>
             </a:r>
             <a:r>
-              <a:rPr kumimoji="1" lang="ja-JP" altLang="en-US" sz="2800" dirty="0" smtClean="0"/>
+              <a:rPr kumimoji="1" lang="ja-JP" altLang="en-US" sz="2800" dirty="0"/>
               <a:t>の先頭部分（長さ自由）、</a:t>
             </a:r>
             <a:r>
-              <a:rPr lang="en-US" altLang="ja-JP" sz="2800" dirty="0" smtClean="0"/>
+              <a:rPr lang="en-US" altLang="ja-JP" sz="2800" dirty="0"/>
               <a:t>suffix(X,Y)</a:t>
             </a:r>
             <a:r>
-              <a:rPr lang="ja-JP" altLang="en-US" sz="2800" dirty="0" smtClean="0"/>
+              <a:rPr lang="ja-JP" altLang="en-US" sz="2800" dirty="0"/>
               <a:t>はリスト</a:t>
             </a:r>
             <a:r>
-              <a:rPr lang="en-US" altLang="ja-JP" sz="2800" dirty="0" smtClean="0"/>
+              <a:rPr lang="en-US" altLang="ja-JP" sz="2800" dirty="0"/>
               <a:t>X</a:t>
             </a:r>
             <a:r>
-              <a:rPr lang="ja-JP" altLang="en-US" sz="2800" dirty="0" smtClean="0"/>
+              <a:rPr lang="ja-JP" altLang="en-US" sz="2800" dirty="0"/>
               <a:t>がリスト</a:t>
             </a:r>
             <a:r>
-              <a:rPr lang="en-US" altLang="ja-JP" sz="2800" dirty="0" smtClean="0"/>
+              <a:rPr lang="en-US" altLang="ja-JP" sz="2800" dirty="0"/>
               <a:t>Y</a:t>
             </a:r>
             <a:r>
-              <a:rPr lang="ja-JP" altLang="en-US" sz="2800" dirty="0" smtClean="0"/>
+              <a:rPr lang="ja-JP" altLang="en-US" sz="2800" dirty="0"/>
               <a:t>の後ろの部分（長さ自由）という関係である。</a:t>
             </a:r>
             <a:endParaRPr kumimoji="1" lang="ja-JP" altLang="en-US" sz="2800" dirty="0"/>
@@ -3843,22 +3812,21 @@
           <a:lstStyle/>
           <a:p>
             <a:r>
-              <a:rPr kumimoji="1" lang="en-US" altLang="ja-JP" dirty="0" smtClean="0"/>
+              <a:rPr kumimoji="1" lang="en-US" altLang="ja-JP" dirty="0"/>
               <a:t>Prefix, suffix</a:t>
             </a:r>
             <a:r>
-              <a:rPr kumimoji="1" lang="ja-JP" altLang="en-US" dirty="0" smtClean="0"/>
+              <a:rPr kumimoji="1" lang="ja-JP" altLang="en-US" dirty="0"/>
               <a:t>の</a:t>
             </a:r>
             <a:r>
-              <a:rPr kumimoji="1" lang="en-US" altLang="ja-JP" dirty="0" smtClean="0"/>
+              <a:rPr kumimoji="1" lang="en-US" altLang="ja-JP" dirty="0"/>
               <a:t>query</a:t>
             </a:r>
             <a:r>
-              <a:rPr kumimoji="1" lang="ja-JP" altLang="en-US" dirty="0" smtClean="0"/>
+              <a:rPr kumimoji="1" lang="ja-JP" altLang="en-US" dirty="0"/>
               <a:t>の例</a:t>
             </a:r>
-            <a:endParaRPr kumimoji="1" lang="ja-JP" altLang="en-US" dirty="0"/>
           </a:p>
         </p:txBody>
       </p:sp>
@@ -3885,38 +3853,38 @@
           <a:lstStyle/>
           <a:p>
             <a:r>
-              <a:rPr kumimoji="1" lang="en-US" altLang="ja-JP" sz="2800" dirty="0" smtClean="0"/>
+              <a:rPr kumimoji="1" lang="en-US" altLang="ja-JP" sz="2800" dirty="0"/>
               <a:t>Prefix, suffix</a:t>
             </a:r>
             <a:r>
-              <a:rPr kumimoji="1" lang="ja-JP" altLang="en-US" sz="2800" dirty="0" smtClean="0"/>
+              <a:rPr kumimoji="1" lang="ja-JP" altLang="en-US" sz="2800" dirty="0"/>
               <a:t>は</a:t>
             </a:r>
             <a:r>
-              <a:rPr kumimoji="1" lang="en-US" altLang="ja-JP" sz="2800" dirty="0" smtClean="0"/>
+              <a:rPr kumimoji="1" lang="en-US" altLang="ja-JP" sz="2800" dirty="0"/>
               <a:t>append</a:t>
             </a:r>
             <a:r>
-              <a:rPr kumimoji="1" lang="ja-JP" altLang="en-US" sz="2800" dirty="0" smtClean="0"/>
+              <a:rPr kumimoji="1" lang="ja-JP" altLang="en-US" sz="2800" dirty="0"/>
               <a:t>同様、</a:t>
             </a:r>
             <a:r>
-              <a:rPr kumimoji="1" lang="en-US" altLang="ja-JP" sz="2800" dirty="0" smtClean="0"/>
+              <a:rPr kumimoji="1" lang="en-US" altLang="ja-JP" sz="2800" dirty="0"/>
               <a:t>GNU Prolog</a:t>
             </a:r>
             <a:r>
-              <a:rPr kumimoji="1" lang="ja-JP" altLang="en-US" sz="2800" dirty="0" smtClean="0"/>
+              <a:rPr kumimoji="1" lang="ja-JP" altLang="en-US" sz="2800" dirty="0"/>
               <a:t>の組み込み述語である（ので定義を入力せず</a:t>
             </a:r>
             <a:r>
-              <a:rPr kumimoji="1" lang="en-US" altLang="ja-JP" sz="2800" dirty="0" smtClean="0"/>
+              <a:rPr kumimoji="1" lang="en-US" altLang="ja-JP" sz="2800" dirty="0"/>
               <a:t>query</a:t>
             </a:r>
             <a:r>
-              <a:rPr lang="ja-JP" altLang="en-US" sz="2800" dirty="0" smtClean="0"/>
+              <a:rPr lang="ja-JP" altLang="en-US" sz="2800" dirty="0"/>
               <a:t>を入力してよい）。</a:t>
             </a:r>
-            <a:endParaRPr lang="en-US" altLang="ja-JP" sz="2800" dirty="0" smtClean="0"/>
+            <a:endParaRPr lang="en-US" altLang="ja-JP" sz="2800" dirty="0"/>
           </a:p>
         </p:txBody>
       </p:sp>
@@ -3942,35 +3910,31 @@
           <a:lstStyle/>
           <a:p>
             <a:r>
-              <a:rPr lang="it-IT" altLang="ja-JP" sz="2800" dirty="0" smtClean="0"/>
+              <a:rPr lang="it-IT" altLang="ja-JP" sz="2800" dirty="0"/>
               <a:t>(</a:t>
             </a:r>
             <a:r>
-              <a:rPr lang="it-IT" altLang="ja-JP" sz="2800" dirty="0" err="1" smtClean="0"/>
+              <a:rPr lang="it-IT" altLang="ja-JP" sz="2800" dirty="0" err="1"/>
               <a:t>suffix</a:t>
             </a:r>
             <a:r>
-              <a:rPr lang="ja-JP" altLang="en-US" sz="2800" dirty="0" smtClean="0"/>
+              <a:rPr lang="ja-JP" altLang="en-US" sz="2800" dirty="0"/>
               <a:t>の</a:t>
             </a:r>
             <a:r>
-              <a:rPr lang="en-US" altLang="ja-JP" sz="2800" dirty="0" smtClean="0"/>
+              <a:rPr lang="en-US" altLang="ja-JP" sz="2800" dirty="0"/>
               <a:t>query</a:t>
             </a:r>
             <a:r>
-              <a:rPr lang="ja-JP" altLang="en-US" sz="2800" dirty="0" smtClean="0"/>
+              <a:rPr lang="ja-JP" altLang="en-US" sz="2800" dirty="0"/>
               <a:t>の例）</a:t>
             </a:r>
-            <a:endParaRPr lang="it-IT" altLang="ja-JP" sz="2800" dirty="0" smtClean="0"/>
-          </a:p>
-          <a:p>
-            <a:r>
-              <a:rPr lang="it-IT" altLang="ja-JP" sz="2800" i="1" dirty="0" smtClean="0"/>
-              <a:t>?</a:t>
-            </a:r>
+            <a:endParaRPr lang="it-IT" altLang="ja-JP" sz="2800" dirty="0"/>
+          </a:p>
+          <a:p>
             <a:r>
               <a:rPr lang="it-IT" altLang="ja-JP" sz="2800" i="1" dirty="0"/>
-              <a:t>-</a:t>
+              <a:t>?-</a:t>
             </a:r>
             <a:r>
               <a:rPr lang="it-IT" altLang="ja-JP" sz="2800" dirty="0"/>
@@ -4066,28 +4030,24 @@
           <a:lstStyle/>
           <a:p>
             <a:r>
-              <a:rPr lang="ja-JP" altLang="en-US" sz="2800" dirty="0" smtClean="0"/>
+              <a:rPr lang="ja-JP" altLang="en-US" sz="2800" dirty="0"/>
               <a:t>（</a:t>
             </a:r>
             <a:r>
-              <a:rPr lang="en-US" altLang="ja-JP" sz="2800" dirty="0" smtClean="0"/>
+              <a:rPr lang="en-US" altLang="ja-JP" sz="2800" dirty="0"/>
               <a:t>prefix</a:t>
             </a:r>
             <a:r>
-              <a:rPr lang="ja-JP" altLang="en-US" sz="2800" dirty="0" smtClean="0"/>
+              <a:rPr lang="ja-JP" altLang="en-US" sz="2800" dirty="0"/>
               <a:t>の</a:t>
             </a:r>
             <a:r>
-              <a:rPr lang="en-US" altLang="ja-JP" sz="2800" dirty="0" smtClean="0"/>
+              <a:rPr lang="en-US" altLang="ja-JP" sz="2800" dirty="0"/>
               <a:t>query</a:t>
             </a:r>
             <a:r>
-              <a:rPr lang="ja-JP" altLang="en-US" sz="2800" dirty="0" smtClean="0"/>
-              <a:t>の例</a:t>
-            </a:r>
-            <a:r>
               <a:rPr lang="ja-JP" altLang="en-US" sz="2800" dirty="0"/>
-              <a:t>）</a:t>
+              <a:t>の例）</a:t>
             </a:r>
             <a:endParaRPr lang="en-US" altLang="ja-JP" sz="2800" dirty="0"/>
           </a:p>
@@ -4211,10 +4171,9 @@
           <a:lstStyle/>
           <a:p>
             <a:r>
-              <a:rPr kumimoji="1" lang="ja-JP" altLang="en-US" dirty="0" smtClean="0"/>
+              <a:rPr kumimoji="1" lang="ja-JP" altLang="en-US" dirty="0"/>
               <a:t>例</a:t>
             </a:r>
-            <a:endParaRPr kumimoji="1" lang="ja-JP" altLang="en-US" dirty="0"/>
           </a:p>
         </p:txBody>
       </p:sp>
@@ -4243,22 +4202,18 @@
           <a:p>
             <a:r>
               <a:rPr lang="en-US" altLang="ja-JP" sz="2800" dirty="0"/>
-              <a:t> </a:t>
-            </a:r>
-            <a:r>
-              <a:rPr lang="en-US" altLang="ja-JP" sz="2800" dirty="0" smtClean="0"/>
-              <a:t>s</a:t>
-            </a:r>
-            <a:r>
-              <a:rPr kumimoji="1" lang="en-US" altLang="ja-JP" sz="2800" dirty="0" smtClean="0"/>
+              <a:t> s</a:t>
+            </a:r>
+            <a:r>
+              <a:rPr kumimoji="1" lang="en-US" altLang="ja-JP" sz="2800" dirty="0"/>
               <a:t>uffix([b],L), prefix(L,[</a:t>
             </a:r>
             <a:r>
-              <a:rPr kumimoji="1" lang="en-US" altLang="ja-JP" sz="2800" dirty="0" err="1" smtClean="0"/>
+              <a:rPr kumimoji="1" lang="en-US" altLang="ja-JP" sz="2800" dirty="0" err="1"/>
               <a:t>a,b,c</a:t>
             </a:r>
             <a:r>
-              <a:rPr kumimoji="1" lang="en-US" altLang="ja-JP" sz="2800" dirty="0" smtClean="0"/>
+              <a:rPr kumimoji="1" lang="en-US" altLang="ja-JP" sz="2800" dirty="0"/>
               <a:t>])</a:t>
             </a:r>
             <a:endParaRPr kumimoji="1" lang="ja-JP" altLang="en-US" sz="2800" dirty="0"/>
@@ -4290,22 +4245,18 @@
           <a:p>
             <a:r>
               <a:rPr lang="en-US" altLang="ja-JP" sz="2800" dirty="0"/>
-              <a:t> </a:t>
-            </a:r>
-            <a:r>
-              <a:rPr lang="en-US" altLang="ja-JP" sz="2800" dirty="0" smtClean="0"/>
-              <a:t>append</a:t>
-            </a:r>
-            <a:r>
-              <a:rPr kumimoji="1" lang="en-US" altLang="ja-JP" sz="2800" dirty="0" smtClean="0"/>
+              <a:t> append</a:t>
+            </a:r>
+            <a:r>
+              <a:rPr kumimoji="1" lang="en-US" altLang="ja-JP" sz="2800" dirty="0"/>
               <a:t>(_1,[b],L), prefix(L,[</a:t>
             </a:r>
             <a:r>
-              <a:rPr kumimoji="1" lang="en-US" altLang="ja-JP" sz="2800" dirty="0" err="1" smtClean="0"/>
+              <a:rPr kumimoji="1" lang="en-US" altLang="ja-JP" sz="2800" dirty="0" err="1"/>
               <a:t>a,b,c</a:t>
             </a:r>
             <a:r>
-              <a:rPr kumimoji="1" lang="en-US" altLang="ja-JP" sz="2800" dirty="0" smtClean="0"/>
+              <a:rPr kumimoji="1" lang="en-US" altLang="ja-JP" sz="2800" dirty="0"/>
               <a:t>])</a:t>
             </a:r>
             <a:endParaRPr kumimoji="1" lang="ja-JP" altLang="en-US" sz="2800" dirty="0"/>
@@ -4336,15 +4287,15 @@
           <a:lstStyle/>
           <a:p>
             <a:r>
-              <a:rPr kumimoji="1" lang="en-US" altLang="ja-JP" sz="2800" dirty="0" smtClean="0"/>
+              <a:rPr kumimoji="1" lang="en-US" altLang="ja-JP" sz="2800" dirty="0"/>
               <a:t> prefix([b],[</a:t>
             </a:r>
             <a:r>
-              <a:rPr kumimoji="1" lang="en-US" altLang="ja-JP" sz="2800" dirty="0" err="1" smtClean="0"/>
+              <a:rPr kumimoji="1" lang="en-US" altLang="ja-JP" sz="2800" dirty="0" err="1"/>
               <a:t>a,b,c</a:t>
             </a:r>
             <a:r>
-              <a:rPr kumimoji="1" lang="en-US" altLang="ja-JP" sz="2800" dirty="0" smtClean="0"/>
+              <a:rPr kumimoji="1" lang="en-US" altLang="ja-JP" sz="2800" dirty="0"/>
               <a:t>])</a:t>
             </a:r>
             <a:endParaRPr kumimoji="1" lang="ja-JP" altLang="en-US" sz="2800" dirty="0"/>
@@ -4380,15 +4331,7 @@
                   <a:srgbClr val="FF0000"/>
                 </a:solidFill>
               </a:rPr>
-              <a:t> </a:t>
-            </a:r>
-            <a:r>
-              <a:rPr lang="en-US" altLang="ja-JP" sz="2400" dirty="0" smtClean="0">
-                <a:solidFill>
-                  <a:srgbClr val="FF0000"/>
-                </a:solidFill>
-              </a:rPr>
-              <a:t>{_1 -&gt; [ ], L-&gt;[b]}</a:t>
+              <a:t> {_1 -&gt; [ ], L-&gt;[b]}</a:t>
             </a:r>
             <a:endParaRPr kumimoji="1" lang="ja-JP" altLang="en-US" sz="2400" dirty="0">
               <a:solidFill>
@@ -4422,15 +4365,15 @@
           <a:lstStyle/>
           <a:p>
             <a:r>
-              <a:rPr kumimoji="1" lang="en-US" altLang="ja-JP" sz="2800" dirty="0" smtClean="0"/>
+              <a:rPr kumimoji="1" lang="en-US" altLang="ja-JP" sz="2800" dirty="0"/>
               <a:t> append([b],_2,[</a:t>
             </a:r>
             <a:r>
-              <a:rPr kumimoji="1" lang="en-US" altLang="ja-JP" sz="2800" dirty="0" err="1" smtClean="0"/>
+              <a:rPr kumimoji="1" lang="en-US" altLang="ja-JP" sz="2800" dirty="0" err="1"/>
               <a:t>a,b,c</a:t>
             </a:r>
             <a:r>
-              <a:rPr kumimoji="1" lang="en-US" altLang="ja-JP" sz="2800" dirty="0" smtClean="0"/>
+              <a:rPr kumimoji="1" lang="en-US" altLang="ja-JP" sz="2800" dirty="0"/>
               <a:t>])</a:t>
             </a:r>
             <a:endParaRPr kumimoji="1" lang="ja-JP" altLang="en-US" sz="2800" dirty="0"/>
@@ -4461,7 +4404,7 @@
           <a:lstStyle/>
           <a:p>
             <a:r>
-              <a:rPr kumimoji="1" lang="en-US" altLang="ja-JP" sz="2800" b="1" dirty="0" smtClean="0"/>
+              <a:rPr kumimoji="1" lang="en-US" altLang="ja-JP" sz="2800" b="1" dirty="0"/>
               <a:t> backtrack</a:t>
             </a:r>
             <a:endParaRPr kumimoji="1" lang="ja-JP" altLang="en-US" sz="2800" b="1" dirty="0"/>
@@ -4497,15 +4440,7 @@
                   <a:srgbClr val="FF0000"/>
                 </a:solidFill>
               </a:rPr>
-              <a:t> </a:t>
-            </a:r>
-            <a:r>
-              <a:rPr lang="en-US" altLang="ja-JP" sz="2400" dirty="0" smtClean="0">
-                <a:solidFill>
-                  <a:srgbClr val="FF0000"/>
-                </a:solidFill>
-              </a:rPr>
-              <a:t>{_1 -&gt; [_3|_4 ], L-&gt;[_3|_5]}</a:t>
+              <a:t> {_1 -&gt; [_3|_4 ], L-&gt;[_3|_5]}</a:t>
             </a:r>
             <a:endParaRPr kumimoji="1" lang="ja-JP" altLang="en-US" sz="2400" dirty="0">
               <a:solidFill>
@@ -4540,28 +4475,24 @@
           <a:p>
             <a:r>
               <a:rPr lang="en-US" altLang="ja-JP" sz="2800" dirty="0"/>
-              <a:t> </a:t>
-            </a:r>
-            <a:r>
-              <a:rPr lang="en-US" altLang="ja-JP" sz="2800" dirty="0" smtClean="0"/>
-              <a:t>append</a:t>
-            </a:r>
-            <a:r>
-              <a:rPr kumimoji="1" lang="en-US" altLang="ja-JP" sz="2800" dirty="0" smtClean="0"/>
+              <a:t> append</a:t>
+            </a:r>
+            <a:r>
+              <a:rPr kumimoji="1" lang="en-US" altLang="ja-JP" sz="2800" dirty="0"/>
               <a:t>(_4, [b], _5),</a:t>
             </a:r>
           </a:p>
           <a:p>
             <a:r>
-              <a:rPr kumimoji="1" lang="en-US" altLang="ja-JP" sz="2800" dirty="0" smtClean="0"/>
+              <a:rPr kumimoji="1" lang="en-US" altLang="ja-JP" sz="2800" dirty="0"/>
               <a:t>        prefix([_3|_5],[</a:t>
             </a:r>
             <a:r>
-              <a:rPr kumimoji="1" lang="en-US" altLang="ja-JP" sz="2800" dirty="0" err="1" smtClean="0"/>
+              <a:rPr kumimoji="1" lang="en-US" altLang="ja-JP" sz="2800" dirty="0" err="1"/>
               <a:t>a,b,c</a:t>
             </a:r>
             <a:r>
-              <a:rPr kumimoji="1" lang="en-US" altLang="ja-JP" sz="2800" dirty="0" smtClean="0"/>
+              <a:rPr kumimoji="1" lang="en-US" altLang="ja-JP" sz="2800" dirty="0"/>
               <a:t>])</a:t>
             </a:r>
             <a:endParaRPr kumimoji="1" lang="ja-JP" altLang="en-US" sz="2800" dirty="0"/>
@@ -4592,15 +4523,15 @@
           <a:lstStyle/>
           <a:p>
             <a:r>
-              <a:rPr kumimoji="1" lang="en-US" altLang="ja-JP" sz="2800" dirty="0" smtClean="0"/>
+              <a:rPr kumimoji="1" lang="en-US" altLang="ja-JP" sz="2800" dirty="0"/>
               <a:t>prefix([_3,b],[</a:t>
             </a:r>
             <a:r>
-              <a:rPr kumimoji="1" lang="en-US" altLang="ja-JP" sz="2800" dirty="0" err="1" smtClean="0"/>
+              <a:rPr kumimoji="1" lang="en-US" altLang="ja-JP" sz="2800" dirty="0" err="1"/>
               <a:t>a,b,c</a:t>
             </a:r>
             <a:r>
-              <a:rPr kumimoji="1" lang="en-US" altLang="ja-JP" sz="2800" dirty="0" smtClean="0"/>
+              <a:rPr kumimoji="1" lang="en-US" altLang="ja-JP" sz="2800" dirty="0"/>
               <a:t>])</a:t>
             </a:r>
             <a:endParaRPr kumimoji="1" lang="ja-JP" altLang="en-US" sz="2800" dirty="0"/>
@@ -4636,15 +4567,7 @@
                   <a:srgbClr val="FF0000"/>
                 </a:solidFill>
               </a:rPr>
-              <a:t> </a:t>
-            </a:r>
-            <a:r>
-              <a:rPr lang="en-US" altLang="ja-JP" sz="2400" dirty="0" smtClean="0">
-                <a:solidFill>
-                  <a:srgbClr val="FF0000"/>
-                </a:solidFill>
-              </a:rPr>
-              <a:t>{_4 -&gt; [ ], _5-&gt;[b]}</a:t>
+              <a:t> {_4 -&gt; [ ], _5-&gt;[b]}</a:t>
             </a:r>
             <a:endParaRPr kumimoji="1" lang="ja-JP" altLang="en-US" sz="2400" dirty="0">
               <a:solidFill>
@@ -4678,19 +4601,19 @@
           <a:lstStyle/>
           <a:p>
             <a:r>
-              <a:rPr lang="en-US" altLang="ja-JP" sz="2800" dirty="0" smtClean="0"/>
+              <a:rPr lang="en-US" altLang="ja-JP" sz="2800" dirty="0"/>
               <a:t>append</a:t>
             </a:r>
             <a:r>
-              <a:rPr kumimoji="1" lang="en-US" altLang="ja-JP" sz="2800" dirty="0" smtClean="0"/>
+              <a:rPr kumimoji="1" lang="en-US" altLang="ja-JP" sz="2800" dirty="0"/>
               <a:t>([_3,b],_6,[</a:t>
             </a:r>
             <a:r>
-              <a:rPr kumimoji="1" lang="en-US" altLang="ja-JP" sz="2800" dirty="0" err="1" smtClean="0"/>
+              <a:rPr kumimoji="1" lang="en-US" altLang="ja-JP" sz="2800" dirty="0" err="1"/>
               <a:t>a,b,c</a:t>
             </a:r>
             <a:r>
-              <a:rPr kumimoji="1" lang="en-US" altLang="ja-JP" sz="2800" dirty="0" smtClean="0"/>
+              <a:rPr kumimoji="1" lang="en-US" altLang="ja-JP" sz="2800" dirty="0"/>
               <a:t>])</a:t>
             </a:r>
             <a:endParaRPr kumimoji="1" lang="ja-JP" altLang="en-US" sz="2800" dirty="0"/>
@@ -4726,15 +4649,7 @@
                   <a:srgbClr val="FF0000"/>
                 </a:solidFill>
               </a:rPr>
-              <a:t> </a:t>
-            </a:r>
-            <a:r>
-              <a:rPr lang="en-US" altLang="ja-JP" sz="2400" dirty="0" smtClean="0">
-                <a:solidFill>
-                  <a:srgbClr val="FF0000"/>
-                </a:solidFill>
-              </a:rPr>
-              <a:t>{_3 -&gt; a}</a:t>
+              <a:t> {_3 -&gt; a}</a:t>
             </a:r>
             <a:endParaRPr kumimoji="1" lang="ja-JP" altLang="en-US" sz="2400" dirty="0">
               <a:solidFill>
@@ -4768,19 +4683,19 @@
           <a:lstStyle/>
           <a:p>
             <a:r>
-              <a:rPr lang="en-US" altLang="ja-JP" sz="2800" dirty="0" smtClean="0"/>
+              <a:rPr lang="en-US" altLang="ja-JP" sz="2800" dirty="0"/>
               <a:t> append</a:t>
             </a:r>
             <a:r>
-              <a:rPr kumimoji="1" lang="en-US" altLang="ja-JP" sz="2800" dirty="0" smtClean="0"/>
+              <a:rPr kumimoji="1" lang="en-US" altLang="ja-JP" sz="2800" dirty="0"/>
               <a:t>([b],_6,[</a:t>
             </a:r>
             <a:r>
-              <a:rPr kumimoji="1" lang="en-US" altLang="ja-JP" sz="2800" dirty="0" err="1" smtClean="0"/>
+              <a:rPr kumimoji="1" lang="en-US" altLang="ja-JP" sz="2800" dirty="0" err="1"/>
               <a:t>b,c</a:t>
             </a:r>
             <a:r>
-              <a:rPr kumimoji="1" lang="en-US" altLang="ja-JP" sz="2800" dirty="0" smtClean="0"/>
+              <a:rPr kumimoji="1" lang="en-US" altLang="ja-JP" sz="2800" dirty="0"/>
               <a:t>])</a:t>
             </a:r>
             <a:endParaRPr kumimoji="1" lang="ja-JP" altLang="en-US" sz="2800" dirty="0"/>
@@ -4811,11 +4726,11 @@
           <a:lstStyle/>
           <a:p>
             <a:r>
-              <a:rPr lang="en-US" altLang="ja-JP" sz="2800" dirty="0" smtClean="0"/>
+              <a:rPr lang="en-US" altLang="ja-JP" sz="2800" dirty="0"/>
               <a:t> append</a:t>
             </a:r>
             <a:r>
-              <a:rPr kumimoji="1" lang="en-US" altLang="ja-JP" sz="2800" dirty="0" smtClean="0"/>
+              <a:rPr kumimoji="1" lang="en-US" altLang="ja-JP" sz="2800" dirty="0"/>
               <a:t>([ ],_6,[c])</a:t>
             </a:r>
             <a:endParaRPr kumimoji="1" lang="ja-JP" altLang="en-US" sz="2800" dirty="0"/>
@@ -4851,15 +4766,7 @@
                   <a:srgbClr val="FF0000"/>
                 </a:solidFill>
               </a:rPr>
-              <a:t> </a:t>
-            </a:r>
-            <a:r>
-              <a:rPr lang="en-US" altLang="ja-JP" sz="2400" dirty="0" smtClean="0">
-                <a:solidFill>
-                  <a:srgbClr val="FF0000"/>
-                </a:solidFill>
-              </a:rPr>
-              <a:t>{_6 -&gt; [c]}</a:t>
+              <a:t> {_6 -&gt; [c]}</a:t>
             </a:r>
             <a:endParaRPr kumimoji="1" lang="ja-JP" altLang="en-US" sz="2400" dirty="0">
               <a:solidFill>
@@ -4893,11 +4800,11 @@
           <a:lstStyle/>
           <a:p>
             <a:r>
-              <a:rPr lang="en-US" altLang="ja-JP" sz="2800" dirty="0" smtClean="0"/>
+              <a:rPr lang="en-US" altLang="ja-JP" sz="2800" dirty="0"/>
               <a:t> </a:t>
             </a:r>
             <a:r>
-              <a:rPr lang="en-US" altLang="ja-JP" sz="2800" i="1" dirty="0" smtClean="0"/>
+              <a:rPr lang="en-US" altLang="ja-JP" sz="2800" i="1" dirty="0"/>
               <a:t>yes</a:t>
             </a:r>
             <a:endParaRPr kumimoji="1" lang="ja-JP" altLang="en-US" sz="2800" i="1" dirty="0"/>
@@ -4928,7 +4835,7 @@
           <a:lstStyle/>
           <a:p>
             <a:r>
-              <a:rPr lang="en-US" altLang="ja-JP" sz="2800" dirty="0" smtClean="0"/>
+              <a:rPr lang="en-US" altLang="ja-JP" sz="2800" dirty="0"/>
               <a:t> …</a:t>
             </a:r>
             <a:endParaRPr kumimoji="1" lang="ja-JP" altLang="en-US" sz="2800" dirty="0"/>
